--- a/brightstar-hr/docs/プレゼン資料.pptx
+++ b/brightstar-hr/docs/プレゼン資料.pptx
@@ -5319,7 +5319,7 @@
                 </a:solidFill>
                 <a:latin typeface="Noto Sans JP"/>
               </a:rPr>
-              <a:t>内容チェック（年月の自動照合）</a:t>
+              <a:t>提出時の内容チェック（自動）</a:t>
             </a:r>
           </a:p>
         </p:txBody>
@@ -5352,13 +5352,29 @@
               </a:spcAft>
             </a:pPr>
             <a:r>
+              <a:rPr sz="1900" b="1">
+                <a:solidFill>
+                  <a:srgbClr val="1390A6"/>
+                </a:solidFill>
+                <a:latin typeface="Noto Sans JP"/>
+              </a:rPr>
+              <a:t>■ 拒否（保存しない）</a:t>
+            </a:r>
+          </a:p>
+          <a:p>
+            <a:pPr algn="l">
+              <a:spcAft>
+                <a:spcPts val="1000"/>
+              </a:spcAft>
+            </a:pPr>
+            <a:r>
               <a:rPr sz="1800" b="0">
                 <a:solidFill>
                   <a:srgbClr val="1B2733"/>
                 </a:solidFill>
                 <a:latin typeface="Noto Sans JP"/>
               </a:rPr>
-              <a:t>・経費：セル A1「YYYY年M月分経費」の年月を読み取り。</a:t>
+              <a:t>・年月：経費 A1「YYYY年M月分」／勤怠 B5 の日付 が提出月と一致しなければ不可。</a:t>
             </a:r>
           </a:p>
           <a:p>
@@ -5374,7 +5390,7 @@
                 </a:solidFill>
                 <a:latin typeface="Noto Sans JP"/>
               </a:rPr>
-              <a:t>・勤怠：セル B5 の日付（YYYY/M/D）の年月を読み取り。</a:t>
+              <a:t>・氏名：勤怠 B3 の氏名が登録氏名と一致しなければ不可。</a:t>
             </a:r>
           </a:p>
           <a:p>
@@ -5384,13 +5400,29 @@
               </a:spcAft>
             </a:pPr>
             <a:r>
+              <a:rPr sz="1900" b="1">
+                <a:solidFill>
+                  <a:srgbClr val="1390A6"/>
+                </a:solidFill>
+                <a:latin typeface="Noto Sans JP"/>
+              </a:rPr>
+              <a:t>■ 警告（保存はする・勤怠）</a:t>
+            </a:r>
+          </a:p>
+          <a:p>
+            <a:pPr algn="l">
+              <a:spcAft>
+                <a:spcPts val="1000"/>
+              </a:spcAft>
+            </a:pPr>
+            <a:r>
               <a:rPr sz="1800" b="0">
                 <a:solidFill>
                   <a:srgbClr val="1B2733"/>
                 </a:solidFill>
                 <a:latin typeface="Noto Sans JP"/>
               </a:rPr>
-              <a:t>・提出月と一致しない場合はアップロードを拒否し、社員へその場で通知。</a:t>
+              <a:t>・休日（土日・祝日）に勤務時間（6/7行）があれば該当日を挙げて確認を促す。</a:t>
             </a:r>
           </a:p>
           <a:p>
@@ -5406,7 +5438,23 @@
                 </a:solidFill>
                 <a:latin typeface="Noto Sans JP"/>
               </a:rPr>
-              <a:t>・標準ライブラリのみで xlsx を解析（依存ゼロ／日付シリアルも対応）。</a:t>
+              <a:t>・5 行目の日付が 1 日〜月末まで揃っていなければ未入力日を通知。</a:t>
+            </a:r>
+          </a:p>
+          <a:p>
+            <a:pPr algn="l">
+              <a:spcAft>
+                <a:spcPts val="1000"/>
+              </a:spcAft>
+            </a:pPr>
+            <a:r>
+              <a:rPr sz="1800" b="0">
+                <a:solidFill>
+                  <a:srgbClr val="1B2733"/>
+                </a:solidFill>
+                <a:latin typeface="Noto Sans JP"/>
+              </a:rPr>
+              <a:t>・※ xlsx 解析は標準ライブラリのみ（依存ゼロ／ふりがな除外／日付シリアル対応）。</a:t>
             </a:r>
           </a:p>
         </p:txBody>
